--- a/openai-hackathon/PromptTracing_Hackathon_Presentation.pptx
+++ b/openai-hackathon/PromptTracing_Hackathon_Presentation.pptx
@@ -3155,8 +3155,8 @@
         </p:nvSpPr>
         <p:spPr>
           <a:xfrm>
-            <a:off x="640080" y="1325880"/>
-            <a:ext cx="7315200" cy="731520"/>
+            <a:off x="640080" y="782360"/>
+            <a:ext cx="7315200" cy="1046440"/>
           </a:xfrm>
           <a:prstGeom prst="rect">
             <a:avLst/>
@@ -3178,8 +3178,27 @@
               </a:defRPr>
             </a:pPr>
             <a:r>
+              <a:rPr dirty="0" err="1"/>
               <a:t>PromptTracing</a:t>
             </a:r>
+            <a:r>
+              <a:rPr lang="en-US" dirty="0"/>
+              <a:t> </a:t>
+            </a:r>
+            <a:br>
+              <a:rPr lang="en-US" dirty="0"/>
+            </a:br>
+            <a:r>
+              <a:rPr lang="en-US" sz="2000" b="1" i="0" dirty="0">
+                <a:solidFill>
+                  <a:srgbClr val="66D9FF"/>
+                </a:solidFill>
+                <a:effectLst/>
+                <a:latin typeface="Arial" panose="020B0604020202020204" pitchFamily="34" charset="0"/>
+              </a:rPr>
+              <a:t>AI AGENT SECURITY OBSERVABILITY</a:t>
+            </a:r>
+            <a:endParaRPr dirty="0"/>
           </a:p>
         </p:txBody>
       </p:sp>
@@ -3214,6 +3233,7 @@
               </a:defRPr>
             </a:pPr>
             <a:r>
+              <a:rPr dirty="0"/>
               <a:t>A flight recorder and policy gate for AI-agent prompt-injection attacks.</a:t>
             </a:r>
           </a:p>
